--- a/builder/assets/reference-pages/cohort-retention.pptx
+++ b/builder/assets/reference-pages/cohort-retention.pptx
@@ -1099,7 +1099,7 @@
                   <a:srgbClr val="15375F"/>
                 </a:solidFill>
               </a:rPr>
-              <a:t>各批次首周均明显流失，二月批次持续落后；较新批次未成熟周期留空</a:t>
+              <a:t>All batches were obviously lost in the first week, and the February batch continued to lag behind; the immature cycle of newer batches was left blank.</a:t>
             </a:r>
           </a:p>
         </p:txBody>
@@ -1184,7 +1184,7 @@
                   <a:srgbClr val="15375F"/>
                 </a:solidFill>
               </a:rPr>
-              <a:t>批次：按首次激活月份分组</a:t>
+              <a:t>Batch: Grouped by first activation month</a:t>
             </a:r>
           </a:p>
         </p:txBody>
@@ -1236,7 +1236,7 @@
                   <a:srgbClr val="697386"/>
                 </a:solidFill>
               </a:rPr>
-              <a:t>指标：各相对周仍活跃的客户数及其占初始基数的比例</a:t>
+              <a:t>Indicator: The number of customers who are still active in each relative week and their proportion to the initial base</a:t>
             </a:r>
           </a:p>
         </p:txBody>
@@ -1288,7 +1288,7 @@
                   <a:srgbClr val="697386"/>
                 </a:solidFill>
               </a:rPr>
-              <a:t>分母：各批次首次激活客户数</a:t>
+              <a:t>Denominator: Number of first-time activated customers in each batch</a:t>
             </a:r>
           </a:p>
         </p:txBody>
@@ -1786,7 +1786,7 @@
                   <a:srgbClr val="697386"/>
                 </a:solidFill>
               </a:rPr>
-              <a:t>第0周</a:t>
+              <a:t>No.0week</a:t>
             </a:r>
           </a:p>
         </p:txBody>
@@ -1869,7 +1869,7 @@
                   <a:srgbClr val="697386"/>
                 </a:solidFill>
               </a:rPr>
-              <a:t>第1周</a:t>
+              <a:t>No.1week</a:t>
             </a:r>
           </a:p>
         </p:txBody>
@@ -1952,7 +1952,7 @@
                   <a:srgbClr val="697386"/>
                 </a:solidFill>
               </a:rPr>
-              <a:t>第2周</a:t>
+              <a:t>No.2week</a:t>
             </a:r>
           </a:p>
         </p:txBody>
@@ -2035,7 +2035,7 @@
                   <a:srgbClr val="697386"/>
                 </a:solidFill>
               </a:rPr>
-              <a:t>第4周</a:t>
+              <a:t>No.4week</a:t>
             </a:r>
           </a:p>
         </p:txBody>
@@ -2118,7 +2118,7 @@
                   <a:srgbClr val="697386"/>
                 </a:solidFill>
               </a:rPr>
-              <a:t>第8周</a:t>
+              <a:t>No.8week</a:t>
             </a:r>
           </a:p>
         </p:txBody>
@@ -2201,7 +2201,7 @@
                   <a:srgbClr val="697386"/>
                 </a:solidFill>
               </a:rPr>
-              <a:t>第12周</a:t>
+              <a:t>No.12week</a:t>
             </a:r>
           </a:p>
         </p:txBody>
@@ -2253,7 +2253,7 @@
                   <a:srgbClr val="697386"/>
                 </a:solidFill>
               </a:rPr>
-              <a:t>相对周期（周）</a:t>
+              <a:t>Relative period (week)</a:t>
             </a:r>
           </a:p>
         </p:txBody>
@@ -3946,7 +3946,7 @@
                   <a:srgbClr val="15375F"/>
                 </a:solidFill>
               </a:rPr>
-              <a:t>2026年1月</a:t>
+              <a:t>2026year1month</a:t>
             </a:r>
           </a:p>
           <a:p xmlns:a="http://schemas.openxmlformats.org/drawingml/2006/main">
@@ -3963,7 +3963,7 @@
                   <a:srgbClr val="15375F"/>
                 </a:solidFill>
               </a:rPr>
-              <a:t>n=200 · 已观察完整</a:t>
+              <a:t>n=200 · Observed completely</a:t>
             </a:r>
           </a:p>
         </p:txBody>
@@ -4015,7 +4015,7 @@
                   <a:srgbClr val="E8872D"/>
                 </a:solidFill>
               </a:rPr>
-              <a:t>2026年2月</a:t>
+              <a:t>2026year2month</a:t>
             </a:r>
           </a:p>
           <a:p xmlns:a="http://schemas.openxmlformats.org/drawingml/2006/main">
@@ -4032,7 +4032,7 @@
                   <a:srgbClr val="E8872D"/>
                 </a:solidFill>
               </a:rPr>
-              <a:t>n=180 · 已观察完整</a:t>
+              <a:t>n=180 · Observed completely</a:t>
             </a:r>
           </a:p>
         </p:txBody>
@@ -4084,7 +4084,7 @@
                   <a:srgbClr val="2F6FB2"/>
                 </a:solidFill>
               </a:rPr>
-              <a:t>2026年3月</a:t>
+              <a:t>2026year3month</a:t>
             </a:r>
           </a:p>
           <a:p xmlns:a="http://schemas.openxmlformats.org/drawingml/2006/main">
@@ -4101,7 +4101,7 @@
                   <a:srgbClr val="2F6FB2"/>
                 </a:solidFill>
               </a:rPr>
-              <a:t>n=210 · 观察至第8周</a:t>
+              <a:t>n=210 · Observed to the first8week</a:t>
             </a:r>
           </a:p>
         </p:txBody>
@@ -4153,7 +4153,7 @@
                   <a:srgbClr val="5B8E7D"/>
                 </a:solidFill>
               </a:rPr>
-              <a:t>2026年4月</a:t>
+              <a:t>2026year4month</a:t>
             </a:r>
           </a:p>
           <a:p xmlns:a="http://schemas.openxmlformats.org/drawingml/2006/main">
@@ -4170,7 +4170,7 @@
                   <a:srgbClr val="5B8E7D"/>
                 </a:solidFill>
               </a:rPr>
-              <a:t>n=160 · 观察至第4周</a:t>
+              <a:t>n=160 · Observed to the first4week</a:t>
             </a:r>
           </a:p>
         </p:txBody>
@@ -4222,7 +4222,7 @@
                   <a:srgbClr val="6A5D8C"/>
                 </a:solidFill>
               </a:rPr>
-              <a:t>2026年5月</a:t>
+              <a:t>2026year5month</a:t>
             </a:r>
           </a:p>
           <a:p xmlns:a="http://schemas.openxmlformats.org/drawingml/2006/main">
@@ -4239,7 +4239,7 @@
                   <a:srgbClr val="6A5D8C"/>
                 </a:solidFill>
               </a:rPr>
-              <a:t>n=190 · 观察至第2周</a:t>
+              <a:t>n=190 · Observed to the first2week</a:t>
             </a:r>
           </a:p>
         </p:txBody>
@@ -4324,7 +4324,7 @@
                   <a:srgbClr val="15375F"/>
                 </a:solidFill>
               </a:rPr>
-              <a:t>读图结论</a:t>
+              <a:t>Conclusion of picture reading</a:t>
             </a:r>
           </a:p>
         </p:txBody>
@@ -4428,7 +4428,7 @@
                   <a:srgbClr val="172033"/>
                 </a:solidFill>
               </a:rPr>
-              <a:t>首周流失是所有批次的共同断点</a:t>
+              <a:t>First week churn is the common breaking point for all batches</a:t>
             </a:r>
           </a:p>
         </p:txBody>
@@ -4532,7 +4532,7 @@
                   <a:srgbClr val="172033"/>
                 </a:solidFill>
               </a:rPr>
-              <a:t>二月批次在各个已观察周期均低于一月批次</a:t>
+              <a:t>The February batch is lower than the January batch in every observed period</a:t>
             </a:r>
           </a:p>
         </p:txBody>
@@ -4636,7 +4636,7 @@
                   <a:srgbClr val="172033"/>
                 </a:solidFill>
               </a:rPr>
-              <a:t>3月以后批次的长期表现尚不能与早期批次直接下结论</a:t>
+              <a:t>3The long-term performance of batches after 3 months cannot be directly concluded from the earlier batches.</a:t>
             </a:r>
           </a:p>
         </p:txBody>
@@ -4688,7 +4688,7 @@
                   <a:srgbClr val="E8872D"/>
                 </a:solidFill>
               </a:rPr>
-              <a:t>空白表示批次尚未成熟或周期未观察，不等于0</a:t>
+              <a:t>Blank indicates that the batch has not yet matured or the cycle has not been observed and is not equal to0</a:t>
             </a:r>
           </a:p>
         </p:txBody>
@@ -4740,7 +4740,7 @@
                   <a:srgbClr val="E8872D"/>
                 </a:solidFill>
               </a:rPr>
-              <a:t>数据期间：2026年1月至5月，单位为客户数，相对周期按周；合成示例数据，非真实客户数据</a:t>
+              <a:t>Data period:2026year1solstice5Month, the unit is the number of customers, the relative period is weekly; synthetic sample data, not real customer data</a:t>
             </a:r>
           </a:p>
         </p:txBody>
@@ -4796,7 +4796,7 @@
                   <a:srgbClr val="15375F"/>
                 </a:solidFill>
               </a:rPr>
-              <a:t>优先核查首周激活体验，并等待较新批次成熟后再比较长期留存</a:t>
+              <a:t>Prioritize verification of the activation experience in the first week, and wait for the newer batches to mature before comparing long-term retention</a:t>
             </a:r>
           </a:p>
         </p:txBody>
